--- a/assets/docs/aulas/aula04_plataformas_restricoes_slides.pptx
+++ b/assets/docs/aulas/aula04_plataformas_restricoes_slides.pptx
@@ -4305,7 +4305,7 @@
                 <a:cs typeface="Georgia"/>
                 <a:ea typeface="Georgia"/>
               </a:rPr>
-              <a:t>Próxima trilha: câmera follow, cena de teste e primeira animação.</a:t>
+              <a:t>Próxima trilha: ClassInd, IARC e design saudável (sem Godot).</a:t>
             </a:r>
           </a:p>
         </p:txBody>
